--- a/tutorial/Bar Graph Sorting.pptx
+++ b/tutorial/Bar Graph Sorting.pptx
@@ -10,6 +10,11 @@
     <p:sldId id="258" r:id="rId4"/>
     <p:sldId id="259" r:id="rId5"/>
     <p:sldId id="260" r:id="rId6"/>
+    <p:sldId id="261" r:id="rId7"/>
+    <p:sldId id="262" r:id="rId8"/>
+    <p:sldId id="263" r:id="rId9"/>
+    <p:sldId id="264" r:id="rId10"/>
+    <p:sldId id="265" r:id="rId11"/>
   </p:sldIdLst>
   <p:sldSz cx="12192000" cy="6858000"/>
   <p:notesSz cx="6858000" cy="9144000"/>
@@ -3419,6 +3424,184 @@
 </p:sld>
 </file>
 
+<file path=ppt/slides/slide10.xml><?xml version="1.0" encoding="utf-8"?>
+<p:sld xmlns:a="http://schemas.openxmlformats.org/drawingml/2006/main" xmlns:r="http://schemas.openxmlformats.org/officeDocument/2006/relationships" xmlns:p="http://schemas.openxmlformats.org/presentationml/2006/main">
+  <p:cSld>
+    <p:spTree>
+      <p:nvGrpSpPr>
+        <p:cNvPr id="1" name="">
+          <a:extLst>
+            <a:ext uri="{FF2B5EF4-FFF2-40B4-BE49-F238E27FC236}">
+              <a16:creationId xmlns:a16="http://schemas.microsoft.com/office/drawing/2014/main" id="{EED2EE9A-FA96-544A-9DC5-1BE7322599D4}"/>
+            </a:ext>
+          </a:extLst>
+        </p:cNvPr>
+        <p:cNvGrpSpPr/>
+        <p:nvPr/>
+      </p:nvGrpSpPr>
+      <p:grpSpPr>
+        <a:xfrm>
+          <a:off x="0" y="0"/>
+          <a:ext cx="0" cy="0"/>
+          <a:chOff x="0" y="0"/>
+          <a:chExt cx="0" cy="0"/>
+        </a:xfrm>
+      </p:grpSpPr>
+      <p:sp>
+        <p:nvSpPr>
+          <p:cNvPr id="2" name="Title 1">
+            <a:extLst>
+              <a:ext uri="{FF2B5EF4-FFF2-40B4-BE49-F238E27FC236}">
+                <a16:creationId xmlns:a16="http://schemas.microsoft.com/office/drawing/2014/main" id="{8D5E33D5-B12E-B347-F8DF-1AADCD3C3B27}"/>
+              </a:ext>
+            </a:extLst>
+          </p:cNvPr>
+          <p:cNvSpPr>
+            <a:spLocks noGrp="1"/>
+          </p:cNvSpPr>
+          <p:nvPr>
+            <p:ph type="title"/>
+          </p:nvPr>
+        </p:nvSpPr>
+        <p:spPr/>
+        <p:txBody>
+          <a:bodyPr/>
+          <a:lstStyle/>
+          <a:p>
+            <a:r>
+              <a:rPr lang="en-US" dirty="0"/>
+              <a:t>Step 9: Animation (Final)</a:t>
+            </a:r>
+          </a:p>
+        </p:txBody>
+      </p:sp>
+      <p:sp>
+        <p:nvSpPr>
+          <p:cNvPr id="6" name="TextBox 5">
+            <a:extLst>
+              <a:ext uri="{FF2B5EF4-FFF2-40B4-BE49-F238E27FC236}">
+                <a16:creationId xmlns:a16="http://schemas.microsoft.com/office/drawing/2014/main" id="{B4399002-FA0F-576C-28FF-5B8B15CBCBAD}"/>
+              </a:ext>
+            </a:extLst>
+          </p:cNvPr>
+          <p:cNvSpPr txBox="1"/>
+          <p:nvPr/>
+        </p:nvSpPr>
+        <p:spPr>
+          <a:xfrm>
+            <a:off x="6878646" y="1800065"/>
+            <a:ext cx="5017477" cy="646331"/>
+          </a:xfrm>
+          <a:prstGeom prst="rect">
+            <a:avLst/>
+          </a:prstGeom>
+          <a:noFill/>
+        </p:spPr>
+        <p:txBody>
+          <a:bodyPr wrap="square" rtlCol="0">
+            <a:spAutoFit/>
+          </a:bodyPr>
+          <a:lstStyle/>
+          <a:p>
+            <a:pPr marL="285750" indent="-285750">
+              <a:buFont typeface="Arial" panose="020B0604020202020204" pitchFamily="34" charset="0"/>
+              <a:buChar char="•"/>
+            </a:pPr>
+            <a:r>
+              <a:rPr lang="en-US" dirty="0"/>
+              <a:t>Smoothly moves bars when data changes</a:t>
+            </a:r>
+          </a:p>
+          <a:p>
+            <a:pPr marL="285750" indent="-285750">
+              <a:buFont typeface="Arial" panose="020B0604020202020204" pitchFamily="34" charset="0"/>
+              <a:buChar char="•"/>
+            </a:pPr>
+            <a:r>
+              <a:rPr lang="en-US" dirty="0"/>
+              <a:t>Makes changes easier to see</a:t>
+            </a:r>
+          </a:p>
+        </p:txBody>
+      </p:sp>
+      <p:sp>
+        <p:nvSpPr>
+          <p:cNvPr id="9" name="TextBox 8">
+            <a:extLst>
+              <a:ext uri="{FF2B5EF4-FFF2-40B4-BE49-F238E27FC236}">
+                <a16:creationId xmlns:a16="http://schemas.microsoft.com/office/drawing/2014/main" id="{31DA7D5B-337D-FF70-109C-742E01C764E4}"/>
+              </a:ext>
+            </a:extLst>
+          </p:cNvPr>
+          <p:cNvSpPr txBox="1"/>
+          <p:nvPr/>
+        </p:nvSpPr>
+        <p:spPr>
+          <a:xfrm>
+            <a:off x="6878646" y="4317838"/>
+            <a:ext cx="4501056" cy="646331"/>
+          </a:xfrm>
+          <a:prstGeom prst="rect">
+            <a:avLst/>
+          </a:prstGeom>
+          <a:noFill/>
+        </p:spPr>
+        <p:txBody>
+          <a:bodyPr wrap="square">
+            <a:spAutoFit/>
+          </a:bodyPr>
+          <a:lstStyle/>
+          <a:p>
+            <a:r>
+              <a:rPr lang="en-US" dirty="0"/>
+              <a:t>Animation helps you see how the data changes instead of jumping instantly.</a:t>
+            </a:r>
+          </a:p>
+        </p:txBody>
+      </p:sp>
+      <p:pic>
+        <p:nvPicPr>
+          <p:cNvPr id="4" name="Picture 3">
+            <a:extLst>
+              <a:ext uri="{FF2B5EF4-FFF2-40B4-BE49-F238E27FC236}">
+                <a16:creationId xmlns:a16="http://schemas.microsoft.com/office/drawing/2014/main" id="{21421615-C78F-449D-A4F7-92B5E4B5286E}"/>
+              </a:ext>
+            </a:extLst>
+          </p:cNvPr>
+          <p:cNvPicPr>
+            <a:picLocks noChangeAspect="1"/>
+          </p:cNvPicPr>
+          <p:nvPr/>
+        </p:nvPicPr>
+        <p:blipFill>
+          <a:blip r:embed="rId2"/>
+          <a:stretch>
+            <a:fillRect/>
+          </a:stretch>
+        </p:blipFill>
+        <p:spPr>
+          <a:xfrm>
+            <a:off x="838200" y="1800065"/>
+            <a:ext cx="3397425" cy="2381372"/>
+          </a:xfrm>
+          <a:prstGeom prst="rect">
+            <a:avLst/>
+          </a:prstGeom>
+        </p:spPr>
+      </p:pic>
+    </p:spTree>
+    <p:extLst>
+      <p:ext uri="{BB962C8B-B14F-4D97-AF65-F5344CB8AC3E}">
+        <p14:creationId xmlns:p14="http://schemas.microsoft.com/office/powerpoint/2010/main" val="1701427084"/>
+      </p:ext>
+    </p:extLst>
+  </p:cSld>
+  <p:clrMapOvr>
+    <a:masterClrMapping/>
+  </p:clrMapOvr>
+</p:sld>
+</file>
+
 <file path=ppt/slides/slide2.xml><?xml version="1.0" encoding="utf-8"?>
 <p:sld xmlns:a="http://schemas.openxmlformats.org/drawingml/2006/main" xmlns:r="http://schemas.openxmlformats.org/officeDocument/2006/relationships" xmlns:p="http://schemas.openxmlformats.org/presentationml/2006/main">
   <p:cSld>
@@ -3510,7 +3693,7 @@
         </p:nvSpPr>
         <p:spPr>
           <a:xfrm>
-            <a:off x="6097011" y="1799644"/>
+            <a:off x="6880782" y="1799638"/>
             <a:ext cx="5619750" cy="646331"/>
           </a:xfrm>
           <a:prstGeom prst="rect">
@@ -3541,6 +3724,41 @@
             <a:r>
               <a:rPr lang="en-US" dirty="0"/>
               <a:t>This is where all graphics will be drawn</a:t>
+            </a:r>
+          </a:p>
+        </p:txBody>
+      </p:sp>
+      <p:sp>
+        <p:nvSpPr>
+          <p:cNvPr id="10" name="TextBox 9">
+            <a:extLst>
+              <a:ext uri="{FF2B5EF4-FFF2-40B4-BE49-F238E27FC236}">
+                <a16:creationId xmlns:a16="http://schemas.microsoft.com/office/drawing/2014/main" id="{670F6F41-DE7D-2CE4-1AF3-63C9B600394D}"/>
+              </a:ext>
+            </a:extLst>
+          </p:cNvPr>
+          <p:cNvSpPr txBox="1"/>
+          <p:nvPr/>
+        </p:nvSpPr>
+        <p:spPr>
+          <a:xfrm>
+            <a:off x="6878646" y="4317838"/>
+            <a:ext cx="4501056" cy="646331"/>
+          </a:xfrm>
+          <a:prstGeom prst="rect">
+            <a:avLst/>
+          </a:prstGeom>
+          <a:noFill/>
+        </p:spPr>
+        <p:txBody>
+          <a:bodyPr wrap="square">
+            <a:spAutoFit/>
+          </a:bodyPr>
+          <a:lstStyle/>
+          <a:p>
+            <a:r>
+              <a:rPr lang="en-US" dirty="0"/>
+              <a:t>This sets up the drawing area, but nothing is visible yet except a border.</a:t>
             </a:r>
           </a:p>
         </p:txBody>
@@ -3623,7 +3841,7 @@
         </p:nvSpPr>
         <p:spPr>
           <a:xfrm>
-            <a:off x="6096000" y="1800065"/>
+            <a:off x="6879771" y="1800061"/>
             <a:ext cx="5017477" cy="923330"/>
           </a:xfrm>
           <a:prstGeom prst="rect">
@@ -3663,7 +3881,7 @@
             </a:pPr>
             <a:r>
               <a:rPr lang="en-US" dirty="0"/>
-              <a:t>Logs data for verification</a:t>
+              <a:t>Prints data to the console to check it worked</a:t>
             </a:r>
           </a:p>
         </p:txBody>
@@ -3698,6 +3916,41 @@
           </a:prstGeom>
         </p:spPr>
       </p:pic>
+      <p:sp>
+        <p:nvSpPr>
+          <p:cNvPr id="14" name="TextBox 13">
+            <a:extLst>
+              <a:ext uri="{FF2B5EF4-FFF2-40B4-BE49-F238E27FC236}">
+                <a16:creationId xmlns:a16="http://schemas.microsoft.com/office/drawing/2014/main" id="{3708AB60-A5E0-09B6-FCFB-90D42D92E590}"/>
+              </a:ext>
+            </a:extLst>
+          </p:cNvPr>
+          <p:cNvSpPr txBox="1"/>
+          <p:nvPr/>
+        </p:nvSpPr>
+        <p:spPr>
+          <a:xfrm>
+            <a:off x="6878646" y="4317838"/>
+            <a:ext cx="4501056" cy="646331"/>
+          </a:xfrm>
+          <a:prstGeom prst="rect">
+            <a:avLst/>
+          </a:prstGeom>
+          <a:noFill/>
+        </p:spPr>
+        <p:txBody>
+          <a:bodyPr wrap="square">
+            <a:spAutoFit/>
+          </a:bodyPr>
+          <a:lstStyle/>
+          <a:p>
+            <a:r>
+              <a:rPr lang="en-US" dirty="0"/>
+              <a:t>This loads the data file and prepares it so we can use it in the chart.</a:t>
+            </a:r>
+          </a:p>
+        </p:txBody>
+      </p:sp>
     </p:spTree>
     <p:extLst>
       <p:ext uri="{BB962C8B-B14F-4D97-AF65-F5344CB8AC3E}">
@@ -3776,7 +4029,7 @@
         </p:nvSpPr>
         <p:spPr>
           <a:xfrm>
-            <a:off x="6096000" y="1800065"/>
+            <a:off x="6879772" y="1799965"/>
             <a:ext cx="5017477" cy="646331"/>
           </a:xfrm>
           <a:prstGeom prst="rect">
@@ -3796,7 +4049,7 @@
             </a:pPr>
             <a:r>
               <a:rPr lang="en-US" dirty="0"/>
-              <a:t>X scale → categories → horizontal position</a:t>
+              <a:t>X scale → positions categories along bottom</a:t>
             </a:r>
           </a:p>
           <a:p>
@@ -3806,7 +4059,7 @@
             </a:pPr>
             <a:r>
               <a:rPr lang="en-US" dirty="0"/>
-              <a:t>Y scale → values → vertical position</a:t>
+              <a:t>Y scale → controls bar height</a:t>
             </a:r>
           </a:p>
         </p:txBody>
@@ -3841,6 +4094,41 @@
           </a:prstGeom>
         </p:spPr>
       </p:pic>
+      <p:sp>
+        <p:nvSpPr>
+          <p:cNvPr id="7" name="TextBox 6">
+            <a:extLst>
+              <a:ext uri="{FF2B5EF4-FFF2-40B4-BE49-F238E27FC236}">
+                <a16:creationId xmlns:a16="http://schemas.microsoft.com/office/drawing/2014/main" id="{487CB113-A90E-556A-4120-7987706E4C78}"/>
+              </a:ext>
+            </a:extLst>
+          </p:cNvPr>
+          <p:cNvSpPr txBox="1"/>
+          <p:nvPr/>
+        </p:nvSpPr>
+        <p:spPr>
+          <a:xfrm>
+            <a:off x="6878646" y="4317838"/>
+            <a:ext cx="4501056" cy="646331"/>
+          </a:xfrm>
+          <a:prstGeom prst="rect">
+            <a:avLst/>
+          </a:prstGeom>
+          <a:noFill/>
+        </p:spPr>
+        <p:txBody>
+          <a:bodyPr wrap="square">
+            <a:spAutoFit/>
+          </a:bodyPr>
+          <a:lstStyle/>
+          <a:p>
+            <a:r>
+              <a:rPr lang="en-US" dirty="0"/>
+              <a:t>Scales turn our data into positions and sizes on the screen.</a:t>
+            </a:r>
+          </a:p>
+        </p:txBody>
+      </p:sp>
     </p:spTree>
     <p:extLst>
       <p:ext uri="{BB962C8B-B14F-4D97-AF65-F5344CB8AC3E}">
@@ -3900,13 +4188,8 @@
           <a:p>
             <a:r>
               <a:rPr lang="en-US" dirty="0"/>
-              <a:t>Step 4</a:t>
-            </a:r>
-            <a:r>
-              <a:rPr lang="en-US"/>
-              <a:t>: Margins + Axes</a:t>
-            </a:r>
-            <a:endParaRPr lang="en-US" dirty="0"/>
+              <a:t>Step 4: Margins + Axes</a:t>
+            </a:r>
           </a:p>
         </p:txBody>
       </p:sp>
@@ -3924,8 +4207,8 @@
         </p:nvSpPr>
         <p:spPr>
           <a:xfrm>
-            <a:off x="6096000" y="1800065"/>
-            <a:ext cx="5017477" cy="646331"/>
+            <a:off x="6878646" y="1800065"/>
+            <a:ext cx="5274316" cy="923330"/>
           </a:xfrm>
           <a:prstGeom prst="rect">
             <a:avLst/>
@@ -3944,7 +4227,7 @@
             </a:pPr>
             <a:r>
               <a:rPr lang="en-US" dirty="0"/>
-              <a:t>X scale → categories → horizontal position</a:t>
+              <a:t>Margins create space so labels are not cut off</a:t>
             </a:r>
           </a:p>
           <a:p>
@@ -3954,17 +4237,27 @@
             </a:pPr>
             <a:r>
               <a:rPr lang="en-US" dirty="0"/>
-              <a:t>Y scale → values → vertical position</a:t>
+              <a:t>The chart group shifts everything into that space</a:t>
+            </a:r>
+          </a:p>
+          <a:p>
+            <a:pPr marL="285750" indent="-285750">
+              <a:buFont typeface="Arial" panose="020B0604020202020204" pitchFamily="34" charset="0"/>
+              <a:buChar char="•"/>
+            </a:pPr>
+            <a:r>
+              <a:rPr lang="en-US" dirty="0"/>
+              <a:t>Axes show the values on the chart</a:t>
             </a:r>
           </a:p>
         </p:txBody>
       </p:sp>
       <p:pic>
         <p:nvPicPr>
-          <p:cNvPr id="4" name="Picture 3">
-            <a:extLst>
-              <a:ext uri="{FF2B5EF4-FFF2-40B4-BE49-F238E27FC236}">
-                <a16:creationId xmlns:a16="http://schemas.microsoft.com/office/drawing/2014/main" id="{FE6E2C12-7AC7-9A4B-C914-E8E05B3AA764}"/>
+          <p:cNvPr id="5" name="Picture 4">
+            <a:extLst>
+              <a:ext uri="{FF2B5EF4-FFF2-40B4-BE49-F238E27FC236}">
+                <a16:creationId xmlns:a16="http://schemas.microsoft.com/office/drawing/2014/main" id="{84F8D175-6E5A-AEBE-5691-A8CEE3D92574}"/>
               </a:ext>
             </a:extLst>
           </p:cNvPr>
@@ -3981,8 +4274,459 @@
         </p:blipFill>
         <p:spPr>
           <a:xfrm>
-            <a:off x="838200" y="1809878"/>
-            <a:ext cx="3924502" cy="4140413"/>
+            <a:off x="838200" y="1800065"/>
+            <a:ext cx="5448580" cy="1200212"/>
+          </a:xfrm>
+          <a:prstGeom prst="rect">
+            <a:avLst/>
+          </a:prstGeom>
+        </p:spPr>
+      </p:pic>
+      <p:pic>
+        <p:nvPicPr>
+          <p:cNvPr id="8" name="Picture 7">
+            <a:extLst>
+              <a:ext uri="{FF2B5EF4-FFF2-40B4-BE49-F238E27FC236}">
+                <a16:creationId xmlns:a16="http://schemas.microsoft.com/office/drawing/2014/main" id="{0005B244-B5B0-9F63-95EA-681748EA26D1}"/>
+              </a:ext>
+            </a:extLst>
+          </p:cNvPr>
+          <p:cNvPicPr>
+            <a:picLocks noChangeAspect="1"/>
+          </p:cNvPicPr>
+          <p:nvPr/>
+        </p:nvPicPr>
+        <p:blipFill>
+          <a:blip r:embed="rId3"/>
+          <a:stretch>
+            <a:fillRect/>
+          </a:stretch>
+        </p:blipFill>
+        <p:spPr>
+          <a:xfrm>
+            <a:off x="838200" y="3241270"/>
+            <a:ext cx="6896454" cy="762039"/>
+          </a:xfrm>
+          <a:prstGeom prst="rect">
+            <a:avLst/>
+          </a:prstGeom>
+        </p:spPr>
+      </p:pic>
+      <p:pic>
+        <p:nvPicPr>
+          <p:cNvPr id="10" name="Picture 9">
+            <a:extLst>
+              <a:ext uri="{FF2B5EF4-FFF2-40B4-BE49-F238E27FC236}">
+                <a16:creationId xmlns:a16="http://schemas.microsoft.com/office/drawing/2014/main" id="{BC63907F-A746-6AE3-9805-EF24B836D642}"/>
+              </a:ext>
+            </a:extLst>
+          </p:cNvPr>
+          <p:cNvPicPr>
+            <a:picLocks noChangeAspect="1"/>
+          </p:cNvPicPr>
+          <p:nvPr/>
+        </p:nvPicPr>
+        <p:blipFill>
+          <a:blip r:embed="rId4"/>
+          <a:stretch>
+            <a:fillRect/>
+          </a:stretch>
+        </p:blipFill>
+        <p:spPr>
+          <a:xfrm>
+            <a:off x="838200" y="4244302"/>
+            <a:ext cx="5258070" cy="1873346"/>
+          </a:xfrm>
+          <a:prstGeom prst="rect">
+            <a:avLst/>
+          </a:prstGeom>
+        </p:spPr>
+      </p:pic>
+      <p:sp>
+        <p:nvSpPr>
+          <p:cNvPr id="12" name="TextBox 11">
+            <a:extLst>
+              <a:ext uri="{FF2B5EF4-FFF2-40B4-BE49-F238E27FC236}">
+                <a16:creationId xmlns:a16="http://schemas.microsoft.com/office/drawing/2014/main" id="{B7E269FA-4DB2-51B6-E755-D6A0988B4777}"/>
+              </a:ext>
+            </a:extLst>
+          </p:cNvPr>
+          <p:cNvSpPr txBox="1"/>
+          <p:nvPr/>
+        </p:nvSpPr>
+        <p:spPr>
+          <a:xfrm>
+            <a:off x="6878646" y="4317838"/>
+            <a:ext cx="4501056" cy="646331"/>
+          </a:xfrm>
+          <a:prstGeom prst="rect">
+            <a:avLst/>
+          </a:prstGeom>
+          <a:noFill/>
+        </p:spPr>
+        <p:txBody>
+          <a:bodyPr wrap="square">
+            <a:spAutoFit/>
+          </a:bodyPr>
+          <a:lstStyle/>
+          <a:p>
+            <a:r>
+              <a:rPr lang="en-US" dirty="0"/>
+              <a:t>We add margins so the axes fit, then draw the axes using the scales.</a:t>
+            </a:r>
+          </a:p>
+        </p:txBody>
+      </p:sp>
+    </p:spTree>
+    <p:extLst>
+      <p:ext uri="{BB962C8B-B14F-4D97-AF65-F5344CB8AC3E}">
+        <p14:creationId xmlns:p14="http://schemas.microsoft.com/office/powerpoint/2010/main" val="704854126"/>
+      </p:ext>
+    </p:extLst>
+  </p:cSld>
+  <p:clrMapOvr>
+    <a:masterClrMapping/>
+  </p:clrMapOvr>
+</p:sld>
+</file>
+
+<file path=ppt/slides/slide6.xml><?xml version="1.0" encoding="utf-8"?>
+<p:sld xmlns:a="http://schemas.openxmlformats.org/drawingml/2006/main" xmlns:r="http://schemas.openxmlformats.org/officeDocument/2006/relationships" xmlns:p="http://schemas.openxmlformats.org/presentationml/2006/main">
+  <p:cSld>
+    <p:spTree>
+      <p:nvGrpSpPr>
+        <p:cNvPr id="1" name="">
+          <a:extLst>
+            <a:ext uri="{FF2B5EF4-FFF2-40B4-BE49-F238E27FC236}">
+              <a16:creationId xmlns:a16="http://schemas.microsoft.com/office/drawing/2014/main" id="{98968C00-B172-61CB-EE98-76974718A47B}"/>
+            </a:ext>
+          </a:extLst>
+        </p:cNvPr>
+        <p:cNvGrpSpPr/>
+        <p:nvPr/>
+      </p:nvGrpSpPr>
+      <p:grpSpPr>
+        <a:xfrm>
+          <a:off x="0" y="0"/>
+          <a:ext cx="0" cy="0"/>
+          <a:chOff x="0" y="0"/>
+          <a:chExt cx="0" cy="0"/>
+        </a:xfrm>
+      </p:grpSpPr>
+      <p:sp>
+        <p:nvSpPr>
+          <p:cNvPr id="2" name="Title 1">
+            <a:extLst>
+              <a:ext uri="{FF2B5EF4-FFF2-40B4-BE49-F238E27FC236}">
+                <a16:creationId xmlns:a16="http://schemas.microsoft.com/office/drawing/2014/main" id="{B942944E-D436-2565-3438-CA25F08A3BF5}"/>
+              </a:ext>
+            </a:extLst>
+          </p:cNvPr>
+          <p:cNvSpPr>
+            <a:spLocks noGrp="1"/>
+          </p:cNvSpPr>
+          <p:nvPr>
+            <p:ph type="title"/>
+          </p:nvPr>
+        </p:nvSpPr>
+        <p:spPr/>
+        <p:txBody>
+          <a:bodyPr/>
+          <a:lstStyle/>
+          <a:p>
+            <a:r>
+              <a:rPr lang="en-US" dirty="0"/>
+              <a:t>Step 5: Bars</a:t>
+            </a:r>
+          </a:p>
+        </p:txBody>
+      </p:sp>
+      <p:sp>
+        <p:nvSpPr>
+          <p:cNvPr id="6" name="TextBox 5">
+            <a:extLst>
+              <a:ext uri="{FF2B5EF4-FFF2-40B4-BE49-F238E27FC236}">
+                <a16:creationId xmlns:a16="http://schemas.microsoft.com/office/drawing/2014/main" id="{21B7B1ED-2F1B-7E86-9065-1D3A72B8FE86}"/>
+              </a:ext>
+            </a:extLst>
+          </p:cNvPr>
+          <p:cNvSpPr txBox="1"/>
+          <p:nvPr/>
+        </p:nvSpPr>
+        <p:spPr>
+          <a:xfrm>
+            <a:off x="6878646" y="1800065"/>
+            <a:ext cx="5017477" cy="646331"/>
+          </a:xfrm>
+          <a:prstGeom prst="rect">
+            <a:avLst/>
+          </a:prstGeom>
+          <a:noFill/>
+        </p:spPr>
+        <p:txBody>
+          <a:bodyPr wrap="square" rtlCol="0">
+            <a:spAutoFit/>
+          </a:bodyPr>
+          <a:lstStyle/>
+          <a:p>
+            <a:pPr marL="285750" indent="-285750">
+              <a:buFont typeface="Arial" panose="020B0604020202020204" pitchFamily="34" charset="0"/>
+              <a:buChar char="•"/>
+            </a:pPr>
+            <a:r>
+              <a:rPr lang="en-US" dirty="0"/>
+              <a:t>Each data item becomes a rectangle</a:t>
+            </a:r>
+          </a:p>
+          <a:p>
+            <a:pPr marL="285750" indent="-285750">
+              <a:buFont typeface="Arial" panose="020B0604020202020204" pitchFamily="34" charset="0"/>
+              <a:buChar char="•"/>
+            </a:pPr>
+            <a:r>
+              <a:rPr lang="en-US" dirty="0"/>
+              <a:t>Position and size come from the scales</a:t>
+            </a:r>
+          </a:p>
+        </p:txBody>
+      </p:sp>
+      <p:pic>
+        <p:nvPicPr>
+          <p:cNvPr id="4" name="Picture 3">
+            <a:extLst>
+              <a:ext uri="{FF2B5EF4-FFF2-40B4-BE49-F238E27FC236}">
+                <a16:creationId xmlns:a16="http://schemas.microsoft.com/office/drawing/2014/main" id="{B3C815EE-A9F6-F9D3-5173-87CC6C4DAA15}"/>
+              </a:ext>
+            </a:extLst>
+          </p:cNvPr>
+          <p:cNvPicPr>
+            <a:picLocks noChangeAspect="1"/>
+          </p:cNvPicPr>
+          <p:nvPr/>
+        </p:nvPicPr>
+        <p:blipFill>
+          <a:blip r:embed="rId2"/>
+          <a:stretch>
+            <a:fillRect/>
+          </a:stretch>
+        </p:blipFill>
+        <p:spPr>
+          <a:xfrm>
+            <a:off x="838200" y="1800065"/>
+            <a:ext cx="3911801" cy="3949903"/>
+          </a:xfrm>
+          <a:prstGeom prst="rect">
+            <a:avLst/>
+          </a:prstGeom>
+        </p:spPr>
+      </p:pic>
+      <p:sp>
+        <p:nvSpPr>
+          <p:cNvPr id="9" name="TextBox 8">
+            <a:extLst>
+              <a:ext uri="{FF2B5EF4-FFF2-40B4-BE49-F238E27FC236}">
+                <a16:creationId xmlns:a16="http://schemas.microsoft.com/office/drawing/2014/main" id="{2000AB7B-EE1C-5AF2-85A5-2A6C209EB89C}"/>
+              </a:ext>
+            </a:extLst>
+          </p:cNvPr>
+          <p:cNvSpPr txBox="1"/>
+          <p:nvPr/>
+        </p:nvSpPr>
+        <p:spPr>
+          <a:xfrm>
+            <a:off x="6878646" y="4317838"/>
+            <a:ext cx="4501056" cy="1200329"/>
+          </a:xfrm>
+          <a:prstGeom prst="rect">
+            <a:avLst/>
+          </a:prstGeom>
+          <a:noFill/>
+        </p:spPr>
+        <p:txBody>
+          <a:bodyPr wrap="square">
+            <a:spAutoFit/>
+          </a:bodyPr>
+          <a:lstStyle/>
+          <a:p>
+            <a:r>
+              <a:rPr lang="en-US" dirty="0"/>
+              <a:t>Each row of data becomes a bar, and the scales decide where it goes and how tall it is. D3 connects data to shapes on the screen.</a:t>
+            </a:r>
+          </a:p>
+        </p:txBody>
+      </p:sp>
+    </p:spTree>
+    <p:extLst>
+      <p:ext uri="{BB962C8B-B14F-4D97-AF65-F5344CB8AC3E}">
+        <p14:creationId xmlns:p14="http://schemas.microsoft.com/office/powerpoint/2010/main" val="4225980606"/>
+      </p:ext>
+    </p:extLst>
+  </p:cSld>
+  <p:clrMapOvr>
+    <a:masterClrMapping/>
+  </p:clrMapOvr>
+</p:sld>
+</file>
+
+<file path=ppt/slides/slide7.xml><?xml version="1.0" encoding="utf-8"?>
+<p:sld xmlns:a="http://schemas.openxmlformats.org/drawingml/2006/main" xmlns:r="http://schemas.openxmlformats.org/officeDocument/2006/relationships" xmlns:p="http://schemas.openxmlformats.org/presentationml/2006/main">
+  <p:cSld>
+    <p:spTree>
+      <p:nvGrpSpPr>
+        <p:cNvPr id="1" name="">
+          <a:extLst>
+            <a:ext uri="{FF2B5EF4-FFF2-40B4-BE49-F238E27FC236}">
+              <a16:creationId xmlns:a16="http://schemas.microsoft.com/office/drawing/2014/main" id="{7C4BC68D-E14C-0450-82E3-A1598A2B415C}"/>
+            </a:ext>
+          </a:extLst>
+        </p:cNvPr>
+        <p:cNvGrpSpPr/>
+        <p:nvPr/>
+      </p:nvGrpSpPr>
+      <p:grpSpPr>
+        <a:xfrm>
+          <a:off x="0" y="0"/>
+          <a:ext cx="0" cy="0"/>
+          <a:chOff x="0" y="0"/>
+          <a:chExt cx="0" cy="0"/>
+        </a:xfrm>
+      </p:grpSpPr>
+      <p:sp>
+        <p:nvSpPr>
+          <p:cNvPr id="2" name="Title 1">
+            <a:extLst>
+              <a:ext uri="{FF2B5EF4-FFF2-40B4-BE49-F238E27FC236}">
+                <a16:creationId xmlns:a16="http://schemas.microsoft.com/office/drawing/2014/main" id="{2DF83A13-BCFD-8DE0-84B9-96CCB604C772}"/>
+              </a:ext>
+            </a:extLst>
+          </p:cNvPr>
+          <p:cNvSpPr>
+            <a:spLocks noGrp="1"/>
+          </p:cNvSpPr>
+          <p:nvPr>
+            <p:ph type="title"/>
+          </p:nvPr>
+        </p:nvSpPr>
+        <p:spPr/>
+        <p:txBody>
+          <a:bodyPr/>
+          <a:lstStyle/>
+          <a:p>
+            <a:r>
+              <a:rPr lang="en-US" dirty="0"/>
+              <a:t>Step 6: Labels</a:t>
+            </a:r>
+          </a:p>
+        </p:txBody>
+      </p:sp>
+      <p:sp>
+        <p:nvSpPr>
+          <p:cNvPr id="6" name="TextBox 5">
+            <a:extLst>
+              <a:ext uri="{FF2B5EF4-FFF2-40B4-BE49-F238E27FC236}">
+                <a16:creationId xmlns:a16="http://schemas.microsoft.com/office/drawing/2014/main" id="{E8CE0CF2-36BE-80AB-4E6B-B19D77290332}"/>
+              </a:ext>
+            </a:extLst>
+          </p:cNvPr>
+          <p:cNvSpPr txBox="1"/>
+          <p:nvPr/>
+        </p:nvSpPr>
+        <p:spPr>
+          <a:xfrm>
+            <a:off x="6878646" y="1800065"/>
+            <a:ext cx="5017477" cy="646331"/>
+          </a:xfrm>
+          <a:prstGeom prst="rect">
+            <a:avLst/>
+          </a:prstGeom>
+          <a:noFill/>
+        </p:spPr>
+        <p:txBody>
+          <a:bodyPr wrap="square" rtlCol="0">
+            <a:spAutoFit/>
+          </a:bodyPr>
+          <a:lstStyle/>
+          <a:p>
+            <a:pPr marL="285750" indent="-285750">
+              <a:buFont typeface="Arial" panose="020B0604020202020204" pitchFamily="34" charset="0"/>
+              <a:buChar char="•"/>
+            </a:pPr>
+            <a:r>
+              <a:rPr lang="en-US" dirty="0"/>
+              <a:t>Adds numbers above each bar</a:t>
+            </a:r>
+          </a:p>
+          <a:p>
+            <a:pPr marL="285750" indent="-285750">
+              <a:buFont typeface="Arial" panose="020B0604020202020204" pitchFamily="34" charset="0"/>
+              <a:buChar char="•"/>
+            </a:pPr>
+            <a:r>
+              <a:rPr lang="en-US" dirty="0"/>
+              <a:t>Uses the same positioning as the bars</a:t>
+            </a:r>
+          </a:p>
+        </p:txBody>
+      </p:sp>
+      <p:sp>
+        <p:nvSpPr>
+          <p:cNvPr id="9" name="TextBox 8">
+            <a:extLst>
+              <a:ext uri="{FF2B5EF4-FFF2-40B4-BE49-F238E27FC236}">
+                <a16:creationId xmlns:a16="http://schemas.microsoft.com/office/drawing/2014/main" id="{040E6212-FEE8-7D45-0755-C902DFCF6F0F}"/>
+              </a:ext>
+            </a:extLst>
+          </p:cNvPr>
+          <p:cNvSpPr txBox="1"/>
+          <p:nvPr/>
+        </p:nvSpPr>
+        <p:spPr>
+          <a:xfrm>
+            <a:off x="6878646" y="4317838"/>
+            <a:ext cx="4501056" cy="646331"/>
+          </a:xfrm>
+          <a:prstGeom prst="rect">
+            <a:avLst/>
+          </a:prstGeom>
+          <a:noFill/>
+        </p:spPr>
+        <p:txBody>
+          <a:bodyPr wrap="square">
+            <a:spAutoFit/>
+          </a:bodyPr>
+          <a:lstStyle/>
+          <a:p>
+            <a:r>
+              <a:rPr lang="en-US" dirty="0"/>
+              <a:t>The labels stay aligned because they use the same positioning as the bars.</a:t>
+            </a:r>
+          </a:p>
+        </p:txBody>
+      </p:sp>
+      <p:pic>
+        <p:nvPicPr>
+          <p:cNvPr id="5" name="Picture 4">
+            <a:extLst>
+              <a:ext uri="{FF2B5EF4-FFF2-40B4-BE49-F238E27FC236}">
+                <a16:creationId xmlns:a16="http://schemas.microsoft.com/office/drawing/2014/main" id="{E043B216-F282-9A99-96C0-095E406FB949}"/>
+              </a:ext>
+            </a:extLst>
+          </p:cNvPr>
+          <p:cNvPicPr>
+            <a:picLocks noChangeAspect="1"/>
+          </p:cNvPicPr>
+          <p:nvPr/>
+        </p:nvPicPr>
+        <p:blipFill>
+          <a:blip r:embed="rId2"/>
+          <a:stretch>
+            <a:fillRect/>
+          </a:stretch>
+        </p:blipFill>
+        <p:spPr>
+          <a:xfrm>
+            <a:off x="838200" y="1800065"/>
+            <a:ext cx="5207268" cy="3733992"/>
           </a:xfrm>
           <a:prstGeom prst="rect">
             <a:avLst/>
@@ -3992,7 +4736,363 @@
     </p:spTree>
     <p:extLst>
       <p:ext uri="{BB962C8B-B14F-4D97-AF65-F5344CB8AC3E}">
-        <p14:creationId xmlns:p14="http://schemas.microsoft.com/office/powerpoint/2010/main" val="704854126"/>
+        <p14:creationId xmlns:p14="http://schemas.microsoft.com/office/powerpoint/2010/main" val="723135513"/>
+      </p:ext>
+    </p:extLst>
+  </p:cSld>
+  <p:clrMapOvr>
+    <a:masterClrMapping/>
+  </p:clrMapOvr>
+</p:sld>
+</file>
+
+<file path=ppt/slides/slide8.xml><?xml version="1.0" encoding="utf-8"?>
+<p:sld xmlns:a="http://schemas.openxmlformats.org/drawingml/2006/main" xmlns:r="http://schemas.openxmlformats.org/officeDocument/2006/relationships" xmlns:p="http://schemas.openxmlformats.org/presentationml/2006/main">
+  <p:cSld>
+    <p:spTree>
+      <p:nvGrpSpPr>
+        <p:cNvPr id="1" name="">
+          <a:extLst>
+            <a:ext uri="{FF2B5EF4-FFF2-40B4-BE49-F238E27FC236}">
+              <a16:creationId xmlns:a16="http://schemas.microsoft.com/office/drawing/2014/main" id="{2B736D4E-002E-DB13-0777-6CCDC3AF1A37}"/>
+            </a:ext>
+          </a:extLst>
+        </p:cNvPr>
+        <p:cNvGrpSpPr/>
+        <p:nvPr/>
+      </p:nvGrpSpPr>
+      <p:grpSpPr>
+        <a:xfrm>
+          <a:off x="0" y="0"/>
+          <a:ext cx="0" cy="0"/>
+          <a:chOff x="0" y="0"/>
+          <a:chExt cx="0" cy="0"/>
+        </a:xfrm>
+      </p:grpSpPr>
+      <p:sp>
+        <p:nvSpPr>
+          <p:cNvPr id="2" name="Title 1">
+            <a:extLst>
+              <a:ext uri="{FF2B5EF4-FFF2-40B4-BE49-F238E27FC236}">
+                <a16:creationId xmlns:a16="http://schemas.microsoft.com/office/drawing/2014/main" id="{8172FD4A-B01C-60AE-281E-ADAD45857412}"/>
+              </a:ext>
+            </a:extLst>
+          </p:cNvPr>
+          <p:cNvSpPr>
+            <a:spLocks noGrp="1"/>
+          </p:cNvSpPr>
+          <p:nvPr>
+            <p:ph type="title"/>
+          </p:nvPr>
+        </p:nvSpPr>
+        <p:spPr/>
+        <p:txBody>
+          <a:bodyPr/>
+          <a:lstStyle/>
+          <a:p>
+            <a:r>
+              <a:rPr lang="en-US" dirty="0"/>
+              <a:t>Step 7: Interaction (Sort Button)</a:t>
+            </a:r>
+          </a:p>
+        </p:txBody>
+      </p:sp>
+      <p:sp>
+        <p:nvSpPr>
+          <p:cNvPr id="6" name="TextBox 5">
+            <a:extLst>
+              <a:ext uri="{FF2B5EF4-FFF2-40B4-BE49-F238E27FC236}">
+                <a16:creationId xmlns:a16="http://schemas.microsoft.com/office/drawing/2014/main" id="{5B7552D7-D2B0-42EB-C5EC-D05E793CC776}"/>
+              </a:ext>
+            </a:extLst>
+          </p:cNvPr>
+          <p:cNvSpPr txBox="1"/>
+          <p:nvPr/>
+        </p:nvSpPr>
+        <p:spPr>
+          <a:xfrm>
+            <a:off x="6878646" y="1800065"/>
+            <a:ext cx="5017477" cy="646331"/>
+          </a:xfrm>
+          <a:prstGeom prst="rect">
+            <a:avLst/>
+          </a:prstGeom>
+          <a:noFill/>
+        </p:spPr>
+        <p:txBody>
+          <a:bodyPr wrap="square" rtlCol="0">
+            <a:spAutoFit/>
+          </a:bodyPr>
+          <a:lstStyle/>
+          <a:p>
+            <a:pPr marL="285750" indent="-285750">
+              <a:buFont typeface="Arial" panose="020B0604020202020204" pitchFamily="34" charset="0"/>
+              <a:buChar char="•"/>
+            </a:pPr>
+            <a:r>
+              <a:rPr lang="en-US" dirty="0"/>
+              <a:t>Adds a button click event</a:t>
+            </a:r>
+          </a:p>
+          <a:p>
+            <a:pPr marL="285750" indent="-285750">
+              <a:buFont typeface="Arial" panose="020B0604020202020204" pitchFamily="34" charset="0"/>
+              <a:buChar char="•"/>
+            </a:pPr>
+            <a:r>
+              <a:rPr lang="en-US" dirty="0"/>
+              <a:t>Reorders the data when clicked</a:t>
+            </a:r>
+          </a:p>
+        </p:txBody>
+      </p:sp>
+      <p:sp>
+        <p:nvSpPr>
+          <p:cNvPr id="9" name="TextBox 8">
+            <a:extLst>
+              <a:ext uri="{FF2B5EF4-FFF2-40B4-BE49-F238E27FC236}">
+                <a16:creationId xmlns:a16="http://schemas.microsoft.com/office/drawing/2014/main" id="{1EECAFB0-BCA9-CA69-8EEE-C6F299CCF1F0}"/>
+              </a:ext>
+            </a:extLst>
+          </p:cNvPr>
+          <p:cNvSpPr txBox="1"/>
+          <p:nvPr/>
+        </p:nvSpPr>
+        <p:spPr>
+          <a:xfrm>
+            <a:off x="6878646" y="4317838"/>
+            <a:ext cx="4501056" cy="646331"/>
+          </a:xfrm>
+          <a:prstGeom prst="rect">
+            <a:avLst/>
+          </a:prstGeom>
+          <a:noFill/>
+        </p:spPr>
+        <p:txBody>
+          <a:bodyPr wrap="square">
+            <a:spAutoFit/>
+          </a:bodyPr>
+          <a:lstStyle/>
+          <a:p>
+            <a:r>
+              <a:rPr lang="en-US" dirty="0"/>
+              <a:t>When the button is clicked, the data is sorted and the chart updates.</a:t>
+            </a:r>
+          </a:p>
+        </p:txBody>
+      </p:sp>
+      <p:pic>
+        <p:nvPicPr>
+          <p:cNvPr id="4" name="Picture 3">
+            <a:extLst>
+              <a:ext uri="{FF2B5EF4-FFF2-40B4-BE49-F238E27FC236}">
+                <a16:creationId xmlns:a16="http://schemas.microsoft.com/office/drawing/2014/main" id="{1DB8B777-1E1B-29DE-62CD-E7D70E87B09D}"/>
+              </a:ext>
+            </a:extLst>
+          </p:cNvPr>
+          <p:cNvPicPr>
+            <a:picLocks noChangeAspect="1"/>
+          </p:cNvPicPr>
+          <p:nvPr/>
+        </p:nvPicPr>
+        <p:blipFill>
+          <a:blip r:embed="rId2"/>
+          <a:stretch>
+            <a:fillRect/>
+          </a:stretch>
+        </p:blipFill>
+        <p:spPr>
+          <a:xfrm>
+            <a:off x="838200" y="1800065"/>
+            <a:ext cx="4750044" cy="1701887"/>
+          </a:xfrm>
+          <a:prstGeom prst="rect">
+            <a:avLst/>
+          </a:prstGeom>
+        </p:spPr>
+      </p:pic>
+    </p:spTree>
+    <p:extLst>
+      <p:ext uri="{BB962C8B-B14F-4D97-AF65-F5344CB8AC3E}">
+        <p14:creationId xmlns:p14="http://schemas.microsoft.com/office/powerpoint/2010/main" val="678601248"/>
+      </p:ext>
+    </p:extLst>
+  </p:cSld>
+  <p:clrMapOvr>
+    <a:masterClrMapping/>
+  </p:clrMapOvr>
+</p:sld>
+</file>
+
+<file path=ppt/slides/slide9.xml><?xml version="1.0" encoding="utf-8"?>
+<p:sld xmlns:a="http://schemas.openxmlformats.org/drawingml/2006/main" xmlns:r="http://schemas.openxmlformats.org/officeDocument/2006/relationships" xmlns:p="http://schemas.openxmlformats.org/presentationml/2006/main">
+  <p:cSld>
+    <p:spTree>
+      <p:nvGrpSpPr>
+        <p:cNvPr id="1" name="">
+          <a:extLst>
+            <a:ext uri="{FF2B5EF4-FFF2-40B4-BE49-F238E27FC236}">
+              <a16:creationId xmlns:a16="http://schemas.microsoft.com/office/drawing/2014/main" id="{9CCF503F-A0BB-2398-3001-AF75A75CF556}"/>
+            </a:ext>
+          </a:extLst>
+        </p:cNvPr>
+        <p:cNvGrpSpPr/>
+        <p:nvPr/>
+      </p:nvGrpSpPr>
+      <p:grpSpPr>
+        <a:xfrm>
+          <a:off x="0" y="0"/>
+          <a:ext cx="0" cy="0"/>
+          <a:chOff x="0" y="0"/>
+          <a:chExt cx="0" cy="0"/>
+        </a:xfrm>
+      </p:grpSpPr>
+      <p:sp>
+        <p:nvSpPr>
+          <p:cNvPr id="2" name="Title 1">
+            <a:extLst>
+              <a:ext uri="{FF2B5EF4-FFF2-40B4-BE49-F238E27FC236}">
+                <a16:creationId xmlns:a16="http://schemas.microsoft.com/office/drawing/2014/main" id="{AE957452-35DF-8AE3-549B-FA8E9ACCBAAD}"/>
+              </a:ext>
+            </a:extLst>
+          </p:cNvPr>
+          <p:cNvSpPr>
+            <a:spLocks noGrp="1"/>
+          </p:cNvSpPr>
+          <p:nvPr>
+            <p:ph type="title"/>
+          </p:nvPr>
+        </p:nvSpPr>
+        <p:spPr/>
+        <p:txBody>
+          <a:bodyPr/>
+          <a:lstStyle/>
+          <a:p>
+            <a:r>
+              <a:rPr lang="en-US" dirty="0"/>
+              <a:t>Step 8: Toggle State</a:t>
+            </a:r>
+          </a:p>
+        </p:txBody>
+      </p:sp>
+      <p:sp>
+        <p:nvSpPr>
+          <p:cNvPr id="6" name="TextBox 5">
+            <a:extLst>
+              <a:ext uri="{FF2B5EF4-FFF2-40B4-BE49-F238E27FC236}">
+                <a16:creationId xmlns:a16="http://schemas.microsoft.com/office/drawing/2014/main" id="{34934063-A5DF-E86A-BB22-C1E64ADCE07F}"/>
+              </a:ext>
+            </a:extLst>
+          </p:cNvPr>
+          <p:cNvSpPr txBox="1"/>
+          <p:nvPr/>
+        </p:nvSpPr>
+        <p:spPr>
+          <a:xfrm>
+            <a:off x="6878646" y="1800065"/>
+            <a:ext cx="5823856" cy="646331"/>
+          </a:xfrm>
+          <a:prstGeom prst="rect">
+            <a:avLst/>
+          </a:prstGeom>
+          <a:noFill/>
+        </p:spPr>
+        <p:txBody>
+          <a:bodyPr wrap="square" rtlCol="0">
+            <a:spAutoFit/>
+          </a:bodyPr>
+          <a:lstStyle/>
+          <a:p>
+            <a:pPr marL="285750" indent="-285750">
+              <a:buFont typeface="Arial" panose="020B0604020202020204" pitchFamily="34" charset="0"/>
+              <a:buChar char="•"/>
+            </a:pPr>
+            <a:r>
+              <a:rPr lang="en-US" dirty="0"/>
+              <a:t>Keeps track of current state (sorted or original)</a:t>
+            </a:r>
+          </a:p>
+          <a:p>
+            <a:pPr marL="285750" indent="-285750">
+              <a:buFont typeface="Arial" panose="020B0604020202020204" pitchFamily="34" charset="0"/>
+              <a:buChar char="•"/>
+            </a:pPr>
+            <a:r>
+              <a:rPr lang="en-US" dirty="0"/>
+              <a:t>Switches between the two</a:t>
+            </a:r>
+          </a:p>
+        </p:txBody>
+      </p:sp>
+      <p:sp>
+        <p:nvSpPr>
+          <p:cNvPr id="9" name="TextBox 8">
+            <a:extLst>
+              <a:ext uri="{FF2B5EF4-FFF2-40B4-BE49-F238E27FC236}">
+                <a16:creationId xmlns:a16="http://schemas.microsoft.com/office/drawing/2014/main" id="{2BFA0D1A-4C80-D818-3C49-C4D23DD038A1}"/>
+              </a:ext>
+            </a:extLst>
+          </p:cNvPr>
+          <p:cNvSpPr txBox="1"/>
+          <p:nvPr/>
+        </p:nvSpPr>
+        <p:spPr>
+          <a:xfrm>
+            <a:off x="6878646" y="4317838"/>
+            <a:ext cx="4501056" cy="646331"/>
+          </a:xfrm>
+          <a:prstGeom prst="rect">
+            <a:avLst/>
+          </a:prstGeom>
+          <a:noFill/>
+        </p:spPr>
+        <p:txBody>
+          <a:bodyPr wrap="square">
+            <a:spAutoFit/>
+          </a:bodyPr>
+          <a:lstStyle/>
+          <a:p>
+            <a:r>
+              <a:rPr lang="en-US" dirty="0"/>
+              <a:t>This lets the button switch back and forth instead of only sorting once.</a:t>
+            </a:r>
+          </a:p>
+        </p:txBody>
+      </p:sp>
+      <p:pic>
+        <p:nvPicPr>
+          <p:cNvPr id="5" name="Picture 4">
+            <a:extLst>
+              <a:ext uri="{FF2B5EF4-FFF2-40B4-BE49-F238E27FC236}">
+                <a16:creationId xmlns:a16="http://schemas.microsoft.com/office/drawing/2014/main" id="{963257F2-238F-97DA-135C-0096E8E0C132}"/>
+              </a:ext>
+            </a:extLst>
+          </p:cNvPr>
+          <p:cNvPicPr>
+            <a:picLocks noChangeAspect="1"/>
+          </p:cNvPicPr>
+          <p:nvPr/>
+        </p:nvPicPr>
+        <p:blipFill>
+          <a:blip r:embed="rId2"/>
+          <a:stretch>
+            <a:fillRect/>
+          </a:stretch>
+        </p:blipFill>
+        <p:spPr>
+          <a:xfrm>
+            <a:off x="838200" y="1800065"/>
+            <a:ext cx="4483330" cy="3283119"/>
+          </a:xfrm>
+          <a:prstGeom prst="rect">
+            <a:avLst/>
+          </a:prstGeom>
+        </p:spPr>
+      </p:pic>
+    </p:spTree>
+    <p:extLst>
+      <p:ext uri="{BB962C8B-B14F-4D97-AF65-F5344CB8AC3E}">
+        <p14:creationId xmlns:p14="http://schemas.microsoft.com/office/powerpoint/2010/main" val="2170204278"/>
       </p:ext>
     </p:extLst>
   </p:cSld>
